--- a/tasuki-electoral-model/output/pptx/TATSUKI_Figures_English.pptx
+++ b/tasuki-electoral-model/output/pptx/TATSUKI_Figures_English.pptx
@@ -3889,7 +3889,7 @@
                   <a:srgbClr val="999999"/>
                 </a:solidFill>
               </a:rPr>
-              <a:t>Trust-Adjusted Scoring with Unified Knowledge Integration (襟) — 6-Phase Cycle</a:t>
+              <a:t>Trust-Adjusted Transparent Scoring with Unified Knowledge Integration (襷) — 6-Phase Cycle</a:t>
             </a:r>
           </a:p>
         </p:txBody>
